--- a/260418_add/ppt/Fig8_cascade_convergence_native_editable.pptx
+++ b/260418_add/ppt/Fig8_cascade_convergence_native_editable.pptx
@@ -28886,8 +28886,8 @@
                 </a:solidFill>
                 <a:latin typeface="Arial"/>
               </a:rPr>
-              <a:t>Radiation
-(50.4 Gy)</a:t>
+              <a:t>SC-RT
+(25 Gy / 5 Fx)</a:t>
             </a:r>
           </a:p>
         </p:txBody>
